--- a/毕设/1_柳子淇_基于ZNS SSD的数据访问特征分析与性能优化.pptx
+++ b/毕设/1_柳子淇_基于ZNS SSD的数据访问特征分析与性能优化.pptx
@@ -235,7 +235,7 @@
           <a:p>
             <a:fld id="{8DBAFB0F-6192-48FE-99AC-AF225DC028A7}" type="datetimeFigureOut">
               <a:rPr lang="zh-CN" altLang="en-US" smtClean="0"/>
-              <a:t>2024/3/6</a:t>
+              <a:t>2024/4/17</a:t>
             </a:fld>
             <a:endParaRPr lang="zh-CN" altLang="en-US"/>
           </a:p>
@@ -3203,7 +3203,7 @@
           <a:p>
             <a:fld id="{B3A1CB8A-CC46-473E-BAED-B264D45A45B1}" type="datetimeFigureOut">
               <a:rPr lang="zh-CN" altLang="en-US" smtClean="0"/>
-              <a:t>2024/3/6</a:t>
+              <a:t>2024/4/17</a:t>
             </a:fld>
             <a:endParaRPr lang="zh-CN" altLang="en-US"/>
           </a:p>
@@ -3374,7 +3374,7 @@
           <a:p>
             <a:fld id="{B3A1CB8A-CC46-473E-BAED-B264D45A45B1}" type="datetimeFigureOut">
               <a:rPr lang="zh-CN" altLang="en-US" smtClean="0"/>
-              <a:t>2024/3/6</a:t>
+              <a:t>2024/4/17</a:t>
             </a:fld>
             <a:endParaRPr lang="zh-CN" altLang="en-US"/>
           </a:p>
@@ -3555,7 +3555,7 @@
           <a:p>
             <a:fld id="{B3A1CB8A-CC46-473E-BAED-B264D45A45B1}" type="datetimeFigureOut">
               <a:rPr lang="zh-CN" altLang="en-US" smtClean="0"/>
-              <a:t>2024/3/6</a:t>
+              <a:t>2024/4/17</a:t>
             </a:fld>
             <a:endParaRPr lang="zh-CN" altLang="en-US"/>
           </a:p>
@@ -3726,7 +3726,7 @@
           <a:p>
             <a:fld id="{B3A1CB8A-CC46-473E-BAED-B264D45A45B1}" type="datetimeFigureOut">
               <a:rPr lang="zh-CN" altLang="en-US" smtClean="0"/>
-              <a:t>2024/3/6</a:t>
+              <a:t>2024/4/17</a:t>
             </a:fld>
             <a:endParaRPr lang="zh-CN" altLang="en-US"/>
           </a:p>
@@ -3974,7 +3974,7 @@
           <a:p>
             <a:fld id="{B3A1CB8A-CC46-473E-BAED-B264D45A45B1}" type="datetimeFigureOut">
               <a:rPr lang="zh-CN" altLang="en-US" smtClean="0"/>
-              <a:t>2024/3/6</a:t>
+              <a:t>2024/4/17</a:t>
             </a:fld>
             <a:endParaRPr lang="zh-CN" altLang="en-US"/>
           </a:p>
@@ -4206,7 +4206,7 @@
           <a:p>
             <a:fld id="{B3A1CB8A-CC46-473E-BAED-B264D45A45B1}" type="datetimeFigureOut">
               <a:rPr lang="zh-CN" altLang="en-US" smtClean="0"/>
-              <a:t>2024/3/6</a:t>
+              <a:t>2024/4/17</a:t>
             </a:fld>
             <a:endParaRPr lang="zh-CN" altLang="en-US"/>
           </a:p>
@@ -4573,7 +4573,7 @@
           <a:p>
             <a:fld id="{B3A1CB8A-CC46-473E-BAED-B264D45A45B1}" type="datetimeFigureOut">
               <a:rPr lang="zh-CN" altLang="en-US" smtClean="0"/>
-              <a:t>2024/3/6</a:t>
+              <a:t>2024/4/17</a:t>
             </a:fld>
             <a:endParaRPr lang="zh-CN" altLang="en-US"/>
           </a:p>
@@ -4693,7 +4693,7 @@
           <a:p>
             <a:fld id="{B3A1CB8A-CC46-473E-BAED-B264D45A45B1}" type="datetimeFigureOut">
               <a:rPr lang="zh-CN" altLang="en-US" smtClean="0"/>
-              <a:t>2024/3/6</a:t>
+              <a:t>2024/4/17</a:t>
             </a:fld>
             <a:endParaRPr lang="zh-CN" altLang="en-US"/>
           </a:p>
@@ -4791,7 +4791,7 @@
           <a:p>
             <a:fld id="{B3A1CB8A-CC46-473E-BAED-B264D45A45B1}" type="datetimeFigureOut">
               <a:rPr lang="zh-CN" altLang="en-US" smtClean="0"/>
-              <a:t>2024/3/6</a:t>
+              <a:t>2024/4/17</a:t>
             </a:fld>
             <a:endParaRPr lang="zh-CN" altLang="en-US"/>
           </a:p>
@@ -5069,7 +5069,7 @@
           <a:p>
             <a:fld id="{B3A1CB8A-CC46-473E-BAED-B264D45A45B1}" type="datetimeFigureOut">
               <a:rPr lang="zh-CN" altLang="en-US" smtClean="0"/>
-              <a:t>2024/3/6</a:t>
+              <a:t>2024/4/17</a:t>
             </a:fld>
             <a:endParaRPr lang="zh-CN" altLang="en-US"/>
           </a:p>
@@ -5324,7 +5324,7 @@
           <a:p>
             <a:fld id="{B3A1CB8A-CC46-473E-BAED-B264D45A45B1}" type="datetimeFigureOut">
               <a:rPr lang="zh-CN" altLang="en-US" smtClean="0"/>
-              <a:t>2024/3/6</a:t>
+              <a:t>2024/4/17</a:t>
             </a:fld>
             <a:endParaRPr lang="zh-CN" altLang="en-US"/>
           </a:p>
@@ -5538,7 +5538,7 @@
           <a:p>
             <a:fld id="{B3A1CB8A-CC46-473E-BAED-B264D45A45B1}" type="datetimeFigureOut">
               <a:rPr lang="zh-CN" altLang="en-US" smtClean="0"/>
-              <a:t>2024/3/6</a:t>
+              <a:t>2024/4/17</a:t>
             </a:fld>
             <a:endParaRPr lang="zh-CN" altLang="en-US"/>
           </a:p>
@@ -6214,7 +6214,7 @@
                 <a:latin typeface="Constantia" panose="02030602050306030303" pitchFamily="18" charset="0"/>
                 <a:cs typeface="Times" panose="02020603050405020304" pitchFamily="18" charset="0"/>
               </a:rPr>
-              <a:t>March 6, 2024</a:t>
+              <a:t>April 17, 2024</a:t>
             </a:fld>
             <a:endParaRPr lang="zh-CN" altLang="en-US" sz="1400" b="1" dirty="0">
               <a:solidFill>
@@ -7391,7 +7391,7 @@
                 <a:latin typeface="Constantia" panose="02030602050306030303" pitchFamily="18" charset="0"/>
                 <a:cs typeface="Times" panose="02020603050405020304" pitchFamily="18" charset="0"/>
               </a:rPr>
-              <a:t>March 6, 2024</a:t>
+              <a:t>April 17, 2024</a:t>
             </a:fld>
             <a:endParaRPr lang="zh-CN" altLang="en-US" sz="1400" b="1" dirty="0">
               <a:solidFill>
@@ -8304,7 +8304,7 @@
                 <a:latin typeface="Constantia" panose="02030602050306030303" pitchFamily="18" charset="0"/>
                 <a:cs typeface="Times" panose="02020603050405020304" pitchFamily="18" charset="0"/>
               </a:rPr>
-              <a:t>March 6, 2024</a:t>
+              <a:t>April 17, 2024</a:t>
             </a:fld>
             <a:endParaRPr lang="zh-CN" altLang="en-US" sz="1400" b="1" dirty="0">
               <a:solidFill>
@@ -9163,7 +9163,7 @@
                 <a:latin typeface="Constantia" panose="02030602050306030303" pitchFamily="18" charset="0"/>
                 <a:cs typeface="Times" panose="02020603050405020304" pitchFamily="18" charset="0"/>
               </a:rPr>
-              <a:t>March 6, 2024</a:t>
+              <a:t>April 17, 2024</a:t>
             </a:fld>
             <a:endParaRPr lang="zh-CN" altLang="en-US" sz="1400" b="1" dirty="0">
               <a:solidFill>
@@ -10013,7 +10013,7 @@
                 <a:latin typeface="Constantia" panose="02030602050306030303" pitchFamily="18" charset="0"/>
                 <a:cs typeface="Times" panose="02020603050405020304" pitchFamily="18" charset="0"/>
               </a:rPr>
-              <a:t>March 6, 2024</a:t>
+              <a:t>April 17, 2024</a:t>
             </a:fld>
             <a:endParaRPr lang="zh-CN" altLang="en-US" sz="1400" b="1" dirty="0">
               <a:solidFill>
@@ -10779,7 +10779,7 @@
                 <a:latin typeface="Constantia" panose="02030602050306030303" pitchFamily="18" charset="0"/>
                 <a:cs typeface="Times" panose="02020603050405020304" pitchFamily="18" charset="0"/>
               </a:rPr>
-              <a:t>March 6, 2024</a:t>
+              <a:t>April 17, 2024</a:t>
             </a:fld>
             <a:endParaRPr lang="zh-CN" altLang="en-US" sz="1400" b="1" dirty="0">
               <a:solidFill>
@@ -11672,7 +11672,7 @@
                 <a:latin typeface="Constantia" panose="02030602050306030303" pitchFamily="18" charset="0"/>
                 <a:cs typeface="Times" panose="02020603050405020304" pitchFamily="18" charset="0"/>
               </a:rPr>
-              <a:t>March 7, 2024</a:t>
+              <a:t>April 17, 2024</a:t>
             </a:fld>
             <a:endParaRPr lang="zh-CN" altLang="en-US" sz="1400" b="1" dirty="0">
               <a:solidFill>
@@ -12985,7 +12985,7 @@
                 <a:latin typeface="Constantia" panose="02030602050306030303" pitchFamily="18" charset="0"/>
                 <a:cs typeface="Times" panose="02020603050405020304" pitchFamily="18" charset="0"/>
               </a:rPr>
-              <a:t>March 7, 2024</a:t>
+              <a:t>April 17, 2024</a:t>
             </a:fld>
             <a:endParaRPr lang="zh-CN" altLang="en-US" sz="1400" b="1" dirty="0">
               <a:solidFill>
@@ -14366,7 +14366,7 @@
                 <a:latin typeface="Constantia" panose="02030602050306030303" pitchFamily="18" charset="0"/>
                 <a:cs typeface="Times" panose="02020603050405020304" pitchFamily="18" charset="0"/>
               </a:rPr>
-              <a:t>March 7, 2024</a:t>
+              <a:t>April 17, 2024</a:t>
             </a:fld>
             <a:endParaRPr lang="zh-CN" altLang="en-US" sz="1400" b="1" dirty="0">
               <a:solidFill>
@@ -15526,7 +15526,7 @@
                 <a:latin typeface="Constantia" panose="02030602050306030303" pitchFamily="18" charset="0"/>
                 <a:cs typeface="Times" panose="02020603050405020304" pitchFamily="18" charset="0"/>
               </a:rPr>
-              <a:t>March 7, 2024</a:t>
+              <a:t>April 17, 2024</a:t>
             </a:fld>
             <a:endParaRPr lang="zh-CN" altLang="en-US" sz="1400" b="1" dirty="0">
               <a:solidFill>
@@ -16678,7 +16678,7 @@
                 <a:latin typeface="Constantia" panose="02030602050306030303" pitchFamily="18" charset="0"/>
                 <a:cs typeface="Times" panose="02020603050405020304" pitchFamily="18" charset="0"/>
               </a:rPr>
-              <a:t>March 7, 2024</a:t>
+              <a:t>April 17, 2024</a:t>
             </a:fld>
             <a:endParaRPr lang="zh-CN" altLang="en-US" sz="1400" b="1" dirty="0">
               <a:solidFill>
@@ -17888,7 +17888,7 @@
                 <a:latin typeface="Constantia" panose="02030602050306030303" pitchFamily="18" charset="0"/>
                 <a:cs typeface="Times" panose="02020603050405020304" pitchFamily="18" charset="0"/>
               </a:rPr>
-              <a:t>March 7, 2024</a:t>
+              <a:t>April 17, 2024</a:t>
             </a:fld>
             <a:endParaRPr lang="zh-CN" altLang="en-US" sz="1400" b="1" dirty="0">
               <a:solidFill>
@@ -18704,7 +18704,7 @@
                 <a:latin typeface="Constantia" panose="02030602050306030303" pitchFamily="18" charset="0"/>
                 <a:cs typeface="Times" panose="02020603050405020304" pitchFamily="18" charset="0"/>
               </a:rPr>
-              <a:t>March 7, 2024</a:t>
+              <a:t>April 17, 2024</a:t>
             </a:fld>
             <a:endParaRPr lang="zh-CN" altLang="en-US" sz="1400" b="1" dirty="0">
               <a:solidFill>
